--- a/dataset/guides_final/SEC/manual/IT-SEC-001-M_피싱·의심 메일 처리 매뉴얼.pptx
+++ b/dataset/guides_final/SEC/manual/IT-SEC-001-M_피싱·의심 메일 처리 매뉴얼.pptx
@@ -41262,7 +41262,7 @@
                 <a:ea typeface="Malgun Gothic"/>
                 <a:cs typeface="Malgun Gothic"/>
               </a:rPr>
-              <a:t>티켓: 담당자 조치가 필요한 건. 정보보안팀에 배정하고 RDY → IP → FIN → CLS 으로 관리한다.</a:t>
+              <a:t>티켓: 담당자 조치가 필요한 건. 정보보안팀에 배정하고 RDY → WIP → FIN → CLS 으로 관리한다.</a:t>
             </a:r>
           </a:p>
         </p:txBody>

--- a/dataset/guides_final/SEC/manual/IT-SEC-001-M_피싱·의심 메일 처리 매뉴얼.pptx
+++ b/dataset/guides_final/SEC/manual/IT-SEC-001-M_피싱·의심 메일 처리 매뉴얼.pptx
@@ -3244,7 +3244,7 @@
                 <a:ea typeface="Malgun Gothic"/>
                 <a:cs typeface="Malgun Gothic"/>
               </a:rPr>
-              <a:t>한화시스템 ICT IT 담당자 매뉴얼 · 정보보안</a:t>
+              <a:t>가상 ICT 기업 IT 담당자 매뉴얼 · 정보보안</a:t>
             </a:r>
           </a:p>
         </p:txBody>
@@ -3523,7 +3523,7 @@
                 <a:ea typeface="Malgun Gothic"/>
                 <a:cs typeface="Malgun Gothic"/>
               </a:rPr>
-              <a:t>© HANWHA SYSTEMS ICT · IT-SEC-001-M · 사내 제한</a:t>
+              <a:t>© 가상 ICT 기업 · IT-SEC-001-M · 사내 제한</a:t>
             </a:r>
           </a:p>
         </p:txBody>
@@ -5711,7 +5711,7 @@
                 <a:ea typeface="Malgun Gothic"/>
                 <a:cs typeface="Malgun Gothic"/>
               </a:rPr>
-              <a:t>© HANWHA SYSTEMS ICT · IT-SEC-001-M · 사내 제한</a:t>
+              <a:t>© 가상 ICT 기업 · IT-SEC-001-M · 사내 제한</a:t>
             </a:r>
           </a:p>
         </p:txBody>
@@ -6769,7 +6769,7 @@
                 <a:ea typeface="Malgun Gothic"/>
                 <a:cs typeface="Malgun Gothic"/>
               </a:rPr>
-              <a:t>© HANWHA SYSTEMS ICT · IT-SEC-001-M · 사내 제한</a:t>
+              <a:t>© 가상 ICT 기업 · IT-SEC-001-M · 사내 제한</a:t>
             </a:r>
           </a:p>
         </p:txBody>
@@ -7898,7 +7898,7 @@
                 <a:ea typeface="Malgun Gothic"/>
                 <a:cs typeface="Malgun Gothic"/>
               </a:rPr>
-              <a:t>© HANWHA SYSTEMS ICT · IT-SEC-001-M · 사내 제한</a:t>
+              <a:t>© 가상 ICT 기업 · IT-SEC-001-M · 사내 제한</a:t>
             </a:r>
           </a:p>
         </p:txBody>
@@ -10579,7 +10579,7 @@
                 <a:ea typeface="Malgun Gothic"/>
                 <a:cs typeface="Malgun Gothic"/>
               </a:rPr>
-              <a:t>© HANWHA SYSTEMS ICT · IT-SEC-001-M · 사내 제한</a:t>
+              <a:t>© 가상 ICT 기업 · IT-SEC-001-M · 사내 제한</a:t>
             </a:r>
           </a:p>
         </p:txBody>
@@ -11872,7 +11872,7 @@
                 <a:ea typeface="Malgun Gothic"/>
                 <a:cs typeface="Malgun Gothic"/>
               </a:rPr>
-              <a:t>© HANWHA SYSTEMS ICT · IT-SEC-001-M · 사내 제한</a:t>
+              <a:t>© 가상 ICT 기업 · IT-SEC-001-M · 사내 제한</a:t>
             </a:r>
           </a:p>
         </p:txBody>
@@ -14084,7 +14084,7 @@
                 <a:ea typeface="Malgun Gothic"/>
                 <a:cs typeface="Malgun Gothic"/>
               </a:rPr>
-              <a:t>© HANWHA SYSTEMS ICT · IT-SEC-001-M · 사내 제한</a:t>
+              <a:t>© 가상 ICT 기업 · IT-SEC-001-M · 사내 제한</a:t>
             </a:r>
           </a:p>
         </p:txBody>
@@ -15204,7 +15204,7 @@
                 <a:ea typeface="Malgun Gothic"/>
                 <a:cs typeface="Malgun Gothic"/>
               </a:rPr>
-              <a:t>© HANWHA SYSTEMS ICT · IT-SEC-001-M · 사내 제한</a:t>
+              <a:t>© 가상 ICT 기업 · IT-SEC-001-M · 사내 제한</a:t>
             </a:r>
           </a:p>
         </p:txBody>
@@ -16267,7 +16267,7 @@
                 <a:ea typeface="Malgun Gothic"/>
                 <a:cs typeface="Malgun Gothic"/>
               </a:rPr>
-              <a:t>© HANWHA SYSTEMS ICT · IT-SEC-001-M · 사내 제한</a:t>
+              <a:t>© 가상 ICT 기업 · IT-SEC-001-M · 사내 제한</a:t>
             </a:r>
           </a:p>
         </p:txBody>
@@ -18408,7 +18408,7 @@
                 <a:ea typeface="Malgun Gothic"/>
                 <a:cs typeface="Malgun Gothic"/>
               </a:rPr>
-              <a:t>비밀번호 재설정 포털(password.hanwha-ict.example)에서 바로 바꾸도록</a:t>
+              <a:t>비밀번호 재설정 포털(password.ict.example)에서 바로 바꾸도록</a:t>
             </a:r>
           </a:p>
           <a:p>
@@ -19018,7 +19018,7 @@
                 <a:ea typeface="Malgun Gothic"/>
                 <a:cs typeface="Malgun Gothic"/>
               </a:rPr>
-              <a:t>© HANWHA SYSTEMS ICT · IT-SEC-001-M · 사내 제한</a:t>
+              <a:t>© 가상 ICT 기업 · IT-SEC-001-M · 사내 제한</a:t>
             </a:r>
           </a:p>
         </p:txBody>
@@ -20379,7 +20379,7 @@
                 <a:ea typeface="Malgun Gothic"/>
                 <a:cs typeface="Malgun Gothic"/>
               </a:rPr>
-              <a:t>© HANWHA SYSTEMS ICT · IT-SEC-001-M · 사내 제한</a:t>
+              <a:t>© 가상 ICT 기업 · IT-SEC-001-M · 사내 제한</a:t>
             </a:r>
           </a:p>
         </p:txBody>
@@ -22022,7 +22022,7 @@
                 <a:ea typeface="Malgun Gothic"/>
                 <a:cs typeface="Malgun Gothic"/>
               </a:rPr>
-              <a:t>© HANWHA SYSTEMS ICT · IT-SEC-001-M · 사내 제한</a:t>
+              <a:t>© 가상 ICT 기업 · IT-SEC-001-M · 사내 제한</a:t>
             </a:r>
           </a:p>
         </p:txBody>
@@ -24140,7 +24140,7 @@
                 <a:ea typeface="Malgun Gothic"/>
                 <a:cs typeface="Malgun Gothic"/>
               </a:rPr>
-              <a:t>© HANWHA SYSTEMS ICT · IT-SEC-001-M · 사내 제한</a:t>
+              <a:t>© 가상 ICT 기업 · IT-SEC-001-M · 사내 제한</a:t>
             </a:r>
           </a:p>
         </p:txBody>
@@ -25284,7 +25284,7 @@
                 <a:ea typeface="Malgun Gothic"/>
                 <a:cs typeface="Malgun Gothic"/>
               </a:rPr>
-              <a:t>© HANWHA SYSTEMS ICT · IT-SEC-001-M · 사내 제한</a:t>
+              <a:t>© 가상 ICT 기업 · IT-SEC-001-M · 사내 제한</a:t>
             </a:r>
           </a:p>
         </p:txBody>
@@ -26303,7 +26303,7 @@
                 <a:ea typeface="Malgun Gothic"/>
                 <a:cs typeface="Malgun Gothic"/>
               </a:rPr>
-              <a:t>© HANWHA SYSTEMS ICT · IT-SEC-001-M · 사내 제한</a:t>
+              <a:t>© 가상 ICT 기업 · IT-SEC-001-M · 사내 제한</a:t>
             </a:r>
           </a:p>
         </p:txBody>
@@ -29213,7 +29213,7 @@
                 <a:ea typeface="Malgun Gothic"/>
                 <a:cs typeface="Malgun Gothic"/>
               </a:rPr>
-              <a:t>© HANWHA SYSTEMS ICT · IT-SEC-001-M · 사내 제한</a:t>
+              <a:t>© 가상 ICT 기업 · IT-SEC-001-M · 사내 제한</a:t>
             </a:r>
           </a:p>
         </p:txBody>
@@ -30232,7 +30232,7 @@
                 <a:ea typeface="Malgun Gothic"/>
                 <a:cs typeface="Malgun Gothic"/>
               </a:rPr>
-              <a:t>© HANWHA SYSTEMS ICT · IT-SEC-001-M · 사내 제한</a:t>
+              <a:t>© 가상 ICT 기업 · IT-SEC-001-M · 사내 제한</a:t>
             </a:r>
           </a:p>
         </p:txBody>
@@ -30480,7 +30480,7 @@
                 <a:ea typeface="Malgun Gothic"/>
                 <a:cs typeface="Malgun Gothic"/>
               </a:rPr>
-              <a:t>© HANWHA SYSTEMS ICT · IT-SEC-001-M · 사내 제한</a:t>
+              <a:t>© 가상 ICT 기업 · IT-SEC-001-M · 사내 제한</a:t>
             </a:r>
           </a:p>
         </p:txBody>
@@ -31395,7 +31395,7 @@
                 <a:ea typeface="Malgun Gothic"/>
                 <a:cs typeface="Malgun Gothic"/>
               </a:rPr>
-              <a:t>© HANWHA SYSTEMS ICT · IT-SEC-001-M · 사내 제한</a:t>
+              <a:t>© 가상 ICT 기업 · IT-SEC-001-M · 사내 제한</a:t>
             </a:r>
           </a:p>
         </p:txBody>
@@ -31643,7 +31643,7 @@
                 <a:ea typeface="Malgun Gothic"/>
                 <a:cs typeface="Malgun Gothic"/>
               </a:rPr>
-              <a:t>© HANWHA SYSTEMS ICT · IT-SEC-001-M · 사내 제한</a:t>
+              <a:t>© 가상 ICT 기업 · IT-SEC-001-M · 사내 제한</a:t>
             </a:r>
           </a:p>
         </p:txBody>
@@ -32783,7 +32783,7 @@
                 <a:ea typeface="Malgun Gothic"/>
                 <a:cs typeface="Malgun Gothic"/>
               </a:rPr>
-              <a:t>© HANWHA SYSTEMS ICT · IT-SEC-001-M · 사내 제한</a:t>
+              <a:t>© 가상 ICT 기업 · IT-SEC-001-M · 사내 제한</a:t>
             </a:r>
           </a:p>
         </p:txBody>
@@ -33031,7 +33031,7 @@
                 <a:ea typeface="Malgun Gothic"/>
                 <a:cs typeface="Malgun Gothic"/>
               </a:rPr>
-              <a:t>© HANWHA SYSTEMS ICT · IT-SEC-001-M · 사내 제한</a:t>
+              <a:t>© 가상 ICT 기업 · IT-SEC-001-M · 사내 제한</a:t>
             </a:r>
           </a:p>
         </p:txBody>
@@ -34177,7 +34177,7 @@
                 <a:ea typeface="Malgun Gothic"/>
                 <a:cs typeface="Malgun Gothic"/>
               </a:rPr>
-              <a:t>© HANWHA SYSTEMS ICT · IT-SEC-001-M · 사내 제한</a:t>
+              <a:t>© 가상 ICT 기업 · IT-SEC-001-M · 사내 제한</a:t>
             </a:r>
           </a:p>
         </p:txBody>
@@ -35656,7 +35656,7 @@
                 <a:ea typeface="Malgun Gothic"/>
                 <a:cs typeface="Malgun Gothic"/>
               </a:rPr>
-              <a:t>© HANWHA SYSTEMS ICT · IT-SEC-001-M · 사내 제한</a:t>
+              <a:t>© 가상 ICT 기업 · IT-SEC-001-M · 사내 제한</a:t>
             </a:r>
           </a:p>
         </p:txBody>
@@ -36586,7 +36586,7 @@
                 <a:ea typeface="Malgun Gothic"/>
                 <a:cs typeface="Malgun Gothic"/>
               </a:rPr>
-              <a:t>© HANWHA SYSTEMS ICT · IT-SEC-001-M · 사내 제한</a:t>
+              <a:t>© 가상 ICT 기업 · IT-SEC-001-M · 사내 제한</a:t>
             </a:r>
           </a:p>
         </p:txBody>
@@ -36834,7 +36834,7 @@
                 <a:ea typeface="Malgun Gothic"/>
                 <a:cs typeface="Malgun Gothic"/>
               </a:rPr>
-              <a:t>© HANWHA SYSTEMS ICT · IT-SEC-001-M · 사내 제한</a:t>
+              <a:t>© 가상 ICT 기업 · IT-SEC-001-M · 사내 제한</a:t>
             </a:r>
           </a:p>
         </p:txBody>
@@ -37756,7 +37756,7 @@
                 <a:ea typeface="Malgun Gothic"/>
                 <a:cs typeface="Malgun Gothic"/>
               </a:rPr>
-              <a:t>© HANWHA SYSTEMS ICT · IT-SEC-001-M · 사내 제한</a:t>
+              <a:t>© 가상 ICT 기업 · IT-SEC-001-M · 사내 제한</a:t>
             </a:r>
           </a:p>
         </p:txBody>
@@ -38004,7 +38004,7 @@
                 <a:ea typeface="Malgun Gothic"/>
                 <a:cs typeface="Malgun Gothic"/>
               </a:rPr>
-              <a:t>© HANWHA SYSTEMS ICT · IT-SEC-001-M · 사내 제한</a:t>
+              <a:t>© 가상 ICT 기업 · IT-SEC-001-M · 사내 제한</a:t>
             </a:r>
           </a:p>
         </p:txBody>
@@ -41826,7 +41826,7 @@
                 <a:ea typeface="Malgun Gothic"/>
                 <a:cs typeface="Malgun Gothic"/>
               </a:rPr>
-              <a:t>© HANWHA SYSTEMS ICT · IT-SEC-001-M · 사내 제한</a:t>
+              <a:t>© 가상 ICT 기업 · IT-SEC-001-M · 사내 제한</a:t>
             </a:r>
           </a:p>
         </p:txBody>
@@ -42271,7 +42271,7 @@
                 <a:ea typeface="Malgun Gothic"/>
                 <a:cs typeface="Malgun Gothic"/>
               </a:rPr>
-              <a:t>© HANWHA SYSTEMS ICT · IT-SEC-001-M · 사내 제한</a:t>
+              <a:t>© 가상 ICT 기업 · IT-SEC-001-M · 사내 제한</a:t>
             </a:r>
           </a:p>
         </p:txBody>
@@ -42519,7 +42519,7 @@
                 <a:ea typeface="Malgun Gothic"/>
                 <a:cs typeface="Malgun Gothic"/>
               </a:rPr>
-              <a:t>© HANWHA SYSTEMS ICT · IT-SEC-001-M · 사내 제한</a:t>
+              <a:t>© 가상 ICT 기업 · IT-SEC-001-M · 사내 제한</a:t>
             </a:r>
           </a:p>
         </p:txBody>
